--- a/Презентация/Отчет по лабораторным работам.pptx
+++ b/Презентация/Отчет по лабораторным работам.pptx
@@ -259,7 +259,7 @@
   </p:defaultTextStyle>
   <p:extLst>
     <p:ext uri="{EFAFB233-063F-42B5-8137-9DF3F51BA10A}">
-      <p15:sldGuideLst xmlns="" xmlns:mc="http://schemas.openxmlformats.org/markup-compatibility/2006" xmlns:mv="urn:schemas-microsoft-com:mac:vml" xmlns:c="http://schemas.openxmlformats.org/drawingml/2006/chart" xmlns:dgm="http://schemas.openxmlformats.org/drawingml/2006/diagram" xmlns:o="urn:schemas-microsoft-com:office:office" xmlns:v="urn:schemas-microsoft-com:vml" xmlns:pvml="urn:schemas-microsoft-com:office:powerpoint" xmlns:com="http://schemas.openxmlformats.org/drawingml/2006/compatibility" xmlns:p14="http://schemas.microsoft.com/office/powerpoint/2010/main" xmlns:p15="http://schemas.microsoft.com/office/powerpoint/2012/main" xmlns:ahyp="http://schemas.microsoft.com/office/drawing/2018/hyperlinkcolor">
+      <p15:sldGuideLst xmlns:ahyp="http://schemas.microsoft.com/office/drawing/2018/hyperlinkcolor" xmlns:p15="http://schemas.microsoft.com/office/powerpoint/2012/main" xmlns:p14="http://schemas.microsoft.com/office/powerpoint/2010/main" xmlns:com="http://schemas.openxmlformats.org/drawingml/2006/compatibility" xmlns:pvml="urn:schemas-microsoft-com:office:powerpoint" xmlns:v="urn:schemas-microsoft-com:vml" xmlns:o="urn:schemas-microsoft-com:office:office" xmlns:dgm="http://schemas.openxmlformats.org/drawingml/2006/diagram" xmlns:c="http://schemas.openxmlformats.org/drawingml/2006/chart" xmlns:mv="urn:schemas-microsoft-com:mac:vml" xmlns:mc="http://schemas.openxmlformats.org/markup-compatibility/2006" xmlns="">
         <p15:guide id="1" orient="horz" pos="1620">
           <p15:clr>
             <a:srgbClr val="747775"/>
@@ -6875,30 +6875,43 @@
       </p:sp>
       <p:pic>
         <p:nvPicPr>
-          <p:cNvPr id="109" name="Google Shape;109;p20" title="git.png"/>
-          <p:cNvPicPr preferRelativeResize="0"/>
+          <p:cNvPr id="1026" name="Picture 2" descr="C:\Users\vodil\OneDrive\Pictures\Screenshots\Снимок экрана 2026-05-16 075515.png"/>
+          <p:cNvPicPr>
+            <a:picLocks noChangeAspect="1" noChangeArrowheads="1"/>
+          </p:cNvPicPr>
           <p:nvPr/>
         </p:nvPicPr>
         <p:blipFill>
           <a:blip r:embed="rId3">
-            <a:alphaModFix/>
+            <a:extLst>
+              <a:ext uri="{28A0092B-C50C-407E-A947-70E740481C1C}">
+                <a14:useLocalDpi xmlns:a14="http://schemas.microsoft.com/office/drawing/2010/main" val="0"/>
+              </a:ext>
+            </a:extLst>
           </a:blip>
+          <a:srcRect/>
           <a:stretch>
             <a:fillRect/>
           </a:stretch>
         </p:blipFill>
-        <p:spPr>
-          <a:xfrm>
-            <a:off x="1019175" y="1681375"/>
-            <a:ext cx="7105650" cy="2619375"/>
+        <p:spPr bwMode="auto">
+          <a:xfrm>
+            <a:off x="845820" y="1864994"/>
+            <a:ext cx="7362825" cy="2314575"/>
           </a:xfrm>
           <a:prstGeom prst="rect">
             <a:avLst/>
           </a:prstGeom>
           <a:noFill/>
-          <a:ln>
-            <a:noFill/>
-          </a:ln>
+          <a:extLst>
+            <a:ext uri="{909E8E84-426E-40DD-AFC4-6F175D3DCCD1}">
+              <a14:hiddenFill xmlns:a14="http://schemas.microsoft.com/office/drawing/2010/main">
+                <a:solidFill>
+                  <a:srgbClr val="FFFFFF"/>
+                </a:solidFill>
+              </a14:hiddenFill>
+            </a:ext>
+          </a:extLst>
         </p:spPr>
       </p:pic>
     </p:spTree>
